--- a/docs/부품비교_Chronos2f_vs_BISTRO_1p_2026-08-12.pptx
+++ b/docs/부품비교_Chronos2f_vs_BISTRO_1p_2026-08-12.pptx
@@ -3295,8 +3295,8 @@
         </p:nvSpPr>
         <p:spPr>
           <a:xfrm>
-            <a:off x="548640" y="4892040"/>
-            <a:ext cx="6400800" cy="320040"/>
+            <a:off x="548640" y="4828032"/>
+            <a:ext cx="6492240" cy="292608"/>
           </a:xfrm>
           <a:prstGeom prst="rect">
             <a:avLst/>
@@ -3315,14 +3315,14 @@
               </a:spcAft>
             </a:pPr>
             <a:r>
-              <a:rPr sz="1150" b="1">
+              <a:rPr sz="1100" b="1">
                 <a:solidFill>
                   <a:srgbClr val="243447"/>
                 </a:solidFill>
                 <a:latin typeface="Apple SD Gothic Neo"/>
                 <a:ea typeface="Apple SD Gothic Neo"/>
               </a:rPr>
-              <a:t>원인 진단 — 조기 구간 단독 성능이 갈림길입니다</a:t>
+              <a:t>원인 ①  증상 — 조기 구간 단독 성능이 갈립니다</a:t>
             </a:r>
           </a:p>
         </p:txBody>
@@ -3335,7 +3335,7 @@
         </p:nvCxnSpPr>
         <p:spPr>
           <a:xfrm>
-            <a:off x="548640" y="5212080"/>
+            <a:off x="548640" y="5120640"/>
             <a:ext cx="6492239" cy="0"/>
           </a:xfrm>
           <a:prstGeom prst="line">
@@ -3370,8 +3370,8 @@
         </p:nvSpPr>
         <p:spPr>
           <a:xfrm>
-            <a:off x="548640" y="5321808"/>
-            <a:ext cx="6492240" cy="365760"/>
+            <a:off x="548640" y="5212080"/>
+            <a:ext cx="6492240" cy="502920"/>
           </a:xfrm>
           <a:prstGeom prst="rect">
             <a:avLst/>
@@ -3386,11 +3386,11 @@
           <a:p>
             <a:pPr algn="l">
               <a:spcAft>
-                <a:spcPts val="300"/>
+                <a:spcPts val="200"/>
               </a:spcAft>
             </a:pPr>
             <a:r>
-              <a:rPr sz="950" b="1">
+              <a:rPr sz="900" b="1">
                 <a:solidFill>
                   <a:srgbClr val="6B6B6B"/>
                 </a:solidFill>
@@ -3400,7 +3400,7 @@
               <a:t>조기 구간 단독 RMSE   </a:t>
             </a:r>
             <a:r>
-              <a:rPr sz="1000" b="0">
+              <a:rPr sz="950" b="0">
                 <a:solidFill>
                   <a:srgbClr val="262626"/>
                 </a:solidFill>
@@ -3410,7 +3410,7 @@
               <a:t>GBM 0.997  ·  Chronos-2f 0.999  ·  XGBoost 1.024  ·  </a:t>
             </a:r>
             <a:r>
-              <a:rPr sz="1000" b="1">
+              <a:rPr sz="950" b="1">
                 <a:solidFill>
                   <a:srgbClr val="B0532F"/>
                 </a:solidFill>
@@ -3423,25 +3423,224 @@
           <a:p>
             <a:pPr algn="l">
               <a:spcAft>
-                <a:spcPts val="300"/>
+                <a:spcPts val="200"/>
               </a:spcAft>
             </a:pPr>
             <a:r>
-              <a:rPr sz="950" b="0">
+              <a:rPr sz="900" b="0">
                 <a:solidFill>
                   <a:srgbClr val="262626"/>
                 </a:solidFill>
                 <a:latin typeface="Apple SD Gothic Neo"/>
                 <a:ea typeface="Apple SD Gothic Neo"/>
               </a:rPr>
-              <a:t>Chronos-2f는 이 구간에서 GBM과 대등(±0.002)하지만, BISTRO는 1.28배 열세 — 평균에 넣는 순간 조합 전체를 끌어내립니다.</a:t>
-            </a:r>
-          </a:p>
-        </p:txBody>
-      </p:sp>
-      <p:sp>
-        <p:nvSpPr>
-          <p:cNvPr id="10" name="Rectangle 9"/>
+              <a:t>Chronos-2f는 GBM과 대등(±0.002), BISTRO는 1.28배 열세 — 평균에 넣는 순간 조합 전체를 끌어내립니다.</a:t>
+            </a:r>
+          </a:p>
+        </p:txBody>
+      </p:sp>
+      <p:sp>
+        <p:nvSpPr>
+          <p:cNvPr id="10" name="TextBox 9"/>
+          <p:cNvSpPr txBox="1"/>
+          <p:nvPr/>
+        </p:nvSpPr>
+        <p:spPr>
+          <a:xfrm>
+            <a:off x="548640" y="5742432"/>
+            <a:ext cx="6492240" cy="292608"/>
+          </a:xfrm>
+          <a:prstGeom prst="rect">
+            <a:avLst/>
+          </a:prstGeom>
+          <a:noFill/>
+        </p:spPr>
+        <p:txBody>
+          <a:bodyPr wrap="square" anchor="t" lIns="18288" rIns="18288" tIns="9144" bIns="9144">
+            <a:spAutoFit/>
+          </a:bodyPr>
+          <a:lstStyle/>
+          <a:p>
+            <a:pPr algn="l">
+              <a:spcAft>
+                <a:spcPts val="200"/>
+              </a:spcAft>
+            </a:pPr>
+            <a:r>
+              <a:rPr sz="1100" b="1">
+                <a:solidFill>
+                  <a:srgbClr val="243447"/>
+                </a:solidFill>
+                <a:latin typeface="Apple SD Gothic Neo"/>
+                <a:ea typeface="Apple SD Gothic Neo"/>
+              </a:rPr>
+              <a:t>원인 ②  근본 — 같은 딥러닝 계열이지만 “지식의 출처”가 다릅니다</a:t>
+            </a:r>
+          </a:p>
+        </p:txBody>
+      </p:sp>
+      <p:cxnSp>
+        <p:nvCxnSpPr>
+          <p:cNvPr id="11" name="Connector 10"/>
+          <p:cNvCxnSpPr/>
+          <p:nvPr/>
+        </p:nvCxnSpPr>
+        <p:spPr>
+          <a:xfrm>
+            <a:off x="548640" y="6035040"/>
+            <a:ext cx="6492239" cy="0"/>
+          </a:xfrm>
+          <a:prstGeom prst="line">
+            <a:avLst/>
+          </a:prstGeom>
+          <a:ln w="9525">
+            <a:solidFill>
+              <a:srgbClr val="C9C9C9"/>
+            </a:solidFill>
+          </a:ln>
+        </p:spPr>
+        <p:style>
+          <a:lnRef idx="2">
+            <a:schemeClr val="accent1"/>
+          </a:lnRef>
+          <a:fillRef idx="0">
+            <a:schemeClr val="accent1"/>
+          </a:fillRef>
+          <a:effectRef idx="1">
+            <a:schemeClr val="accent1"/>
+          </a:effectRef>
+          <a:fontRef idx="minor">
+            <a:schemeClr val="tx1"/>
+          </a:fontRef>
+        </p:style>
+      </p:cxnSp>
+      <p:sp>
+        <p:nvSpPr>
+          <p:cNvPr id="12" name="TextBox 11"/>
+          <p:cNvSpPr txBox="1"/>
+          <p:nvPr/>
+        </p:nvSpPr>
+        <p:spPr>
+          <a:xfrm>
+            <a:off x="548640" y="6089904"/>
+            <a:ext cx="6492240" cy="548640"/>
+          </a:xfrm>
+          <a:prstGeom prst="rect">
+            <a:avLst/>
+          </a:prstGeom>
+          <a:noFill/>
+        </p:spPr>
+        <p:txBody>
+          <a:bodyPr wrap="square" anchor="t" lIns="18288" rIns="18288" tIns="9144" bIns="9144">
+            <a:spAutoFit/>
+          </a:bodyPr>
+          <a:lstStyle/>
+          <a:p>
+            <a:pPr algn="l">
+              <a:spcAft>
+                <a:spcPts val="150"/>
+              </a:spcAft>
+            </a:pPr>
+            <a:r>
+              <a:rPr sz="880" b="0">
+                <a:solidFill>
+                  <a:srgbClr val="262626"/>
+                </a:solidFill>
+                <a:latin typeface="Apple SD Gothic Neo"/>
+                <a:ea typeface="Apple SD Gothic Neo"/>
+              </a:rPr>
+              <a:t>· Chronos-2f = </a:t>
+            </a:r>
+            <a:r>
+              <a:rPr sz="880" b="1">
+                <a:solidFill>
+                  <a:srgbClr val="008A3E"/>
+                </a:solidFill>
+                <a:latin typeface="Apple SD Gothic Neo"/>
+                <a:ea typeface="Apple SD Gothic Neo"/>
+              </a:rPr>
+              <a:t>사전학습</a:t>
+            </a:r>
+            <a:r>
+              <a:rPr sz="880" b="0">
+                <a:solidFill>
+                  <a:srgbClr val="262626"/>
+                </a:solidFill>
+                <a:latin typeface="Apple SD Gothic Neo"/>
+                <a:ea typeface="Apple SD Gothic Neo"/>
+              </a:rPr>
+              <a:t>: 전 세계 시계열로 학습 후 동결(우리 데이터는 문맥으로만) → 140행에 과적합 통로 없음 + 유일하게 일별 신호 입력</a:t>
+            </a:r>
+          </a:p>
+          <a:p>
+            <a:pPr algn="l">
+              <a:spcAft>
+                <a:spcPts val="150"/>
+              </a:spcAft>
+            </a:pPr>
+            <a:r>
+              <a:rPr sz="880" b="0">
+                <a:solidFill>
+                  <a:srgbClr val="262626"/>
+                </a:solidFill>
+                <a:latin typeface="Apple SD Gothic Neo"/>
+                <a:ea typeface="Apple SD Gothic Neo"/>
+              </a:rPr>
+              <a:t>· BISTRO = </a:t>
+            </a:r>
+            <a:r>
+              <a:rPr sz="880" b="1">
+                <a:solidFill>
+                  <a:srgbClr val="B0532F"/>
+                </a:solidFill>
+                <a:latin typeface="Apple SD Gothic Neo"/>
+                <a:ea typeface="Apple SD Gothic Neo"/>
+              </a:rPr>
+              <a:t>직접학습</a:t>
+            </a:r>
+            <a:r>
+              <a:rPr sz="880" b="0">
+                <a:solidFill>
+                  <a:srgbClr val="262626"/>
+                </a:solidFill>
+                <a:latin typeface="Apple SD Gothic Neo"/>
+                <a:ea typeface="Apple SD Gothic Neo"/>
+              </a:rPr>
+              <a:t>: 월 140행으로 파라미터 학습 → 과적합·급변기 붕괴(반등 단독 2.40), 입력도 월별 패널뿐</a:t>
+            </a:r>
+          </a:p>
+          <a:p>
+            <a:pPr algn="l">
+              <a:spcAft>
+                <a:spcPts val="150"/>
+              </a:spcAft>
+            </a:pPr>
+            <a:r>
+              <a:rPr sz="880" b="0">
+                <a:solidFill>
+                  <a:srgbClr val="262626"/>
+                </a:solidFill>
+                <a:latin typeface="Apple SD Gothic Neo"/>
+                <a:ea typeface="Apple SD Gothic Neo"/>
+              </a:rPr>
+              <a:t>→ 갈림길은 아키텍처가 아니라 </a:t>
+            </a:r>
+            <a:r>
+              <a:rPr sz="880" b="1">
+                <a:solidFill>
+                  <a:srgbClr val="262626"/>
+                </a:solidFill>
+                <a:latin typeface="Apple SD Gothic Neo"/>
+                <a:ea typeface="Apple SD Gothic Neo"/>
+              </a:rPr>
+              <a:t>①지식의 출처(외부 사전학습 vs 내부 소표본) ②정보원 주기(일별 vs 월별)</a:t>
+            </a:r>
+          </a:p>
+        </p:txBody>
+      </p:sp>
+      <p:sp>
+        <p:nvSpPr>
+          <p:cNvPr id="13" name="Rectangle 12"/>
           <p:cNvSpPr/>
           <p:nvPr/>
         </p:nvSpPr>
@@ -3485,7 +3684,7 @@
       </p:sp>
       <p:sp>
         <p:nvSpPr>
-          <p:cNvPr id="11" name="TextBox 10"/>
+          <p:cNvPr id="14" name="TextBox 13"/>
           <p:cNvSpPr txBox="1"/>
           <p:nvPr/>
         </p:nvSpPr>
@@ -3661,7 +3860,7 @@
       </p:sp>
       <p:sp>
         <p:nvSpPr>
-          <p:cNvPr id="12" name="Rectangle 11"/>
+          <p:cNvPr id="15" name="Rectangle 14"/>
           <p:cNvSpPr/>
           <p:nvPr/>
         </p:nvSpPr>
@@ -3705,7 +3904,7 @@
       </p:sp>
       <p:sp>
         <p:nvSpPr>
-          <p:cNvPr id="13" name="TextBox 12"/>
+          <p:cNvPr id="16" name="TextBox 15"/>
           <p:cNvSpPr txBox="1"/>
           <p:nvPr/>
         </p:nvSpPr>
@@ -3813,7 +4012,7 @@
       </p:sp>
       <p:sp>
         <p:nvSpPr>
-          <p:cNvPr id="14" name="Rectangle 13"/>
+          <p:cNvPr id="17" name="Rectangle 16"/>
           <p:cNvSpPr/>
           <p:nvPr/>
         </p:nvSpPr>
@@ -3857,7 +4056,7 @@
       </p:sp>
       <p:sp>
         <p:nvSpPr>
-          <p:cNvPr id="15" name="Rectangle 14"/>
+          <p:cNvPr id="18" name="Rectangle 17"/>
           <p:cNvSpPr/>
           <p:nvPr/>
         </p:nvSpPr>
@@ -3901,7 +4100,7 @@
       </p:sp>
       <p:sp>
         <p:nvSpPr>
-          <p:cNvPr id="16" name="TextBox 15"/>
+          <p:cNvPr id="19" name="TextBox 18"/>
           <p:cNvSpPr txBox="1"/>
           <p:nvPr/>
         </p:nvSpPr>
@@ -3958,14 +4157,14 @@
       </p:sp>
       <p:sp>
         <p:nvSpPr>
-          <p:cNvPr id="17" name="TextBox 16"/>
+          <p:cNvPr id="20" name="TextBox 19"/>
           <p:cNvSpPr txBox="1"/>
           <p:nvPr/>
         </p:nvSpPr>
         <p:spPr>
           <a:xfrm>
-            <a:off x="548640" y="6455664"/>
-            <a:ext cx="10515600" cy="274320"/>
+            <a:off x="548640" y="6601968"/>
+            <a:ext cx="10515600" cy="228600"/>
           </a:xfrm>
           <a:prstGeom prst="rect">
             <a:avLst/>
@@ -3984,7 +4183,7 @@
               </a:spcAft>
             </a:pPr>
             <a:r>
-              <a:rPr sz="800" b="0">
+              <a:rPr sz="750" b="0">
                 <a:solidFill>
                   <a:srgbClr val="6B6B6B"/>
                 </a:solidFill>
@@ -3998,14 +4197,14 @@
       </p:sp>
       <p:sp>
         <p:nvSpPr>
-          <p:cNvPr id="18" name="TextBox 17"/>
+          <p:cNvPr id="21" name="TextBox 20"/>
           <p:cNvSpPr txBox="1"/>
           <p:nvPr/>
         </p:nvSpPr>
         <p:spPr>
           <a:xfrm>
-            <a:off x="11292840" y="6455664"/>
-            <a:ext cx="457200" cy="274320"/>
+            <a:off x="11292840" y="6583680"/>
+            <a:ext cx="457200" cy="228600"/>
           </a:xfrm>
           <a:prstGeom prst="rect">
             <a:avLst/>

--- a/docs/부품비교_Chronos2f_vs_BISTRO_1p_2026-08-12.pptx
+++ b/docs/부품비교_Chronos2f_vs_BISTRO_1p_2026-08-12.pptx
@@ -3586,7 +3586,7 @@
                 <a:latin typeface="Apple SD Gothic Neo"/>
                 <a:ea typeface="Apple SD Gothic Neo"/>
               </a:rPr>
-              <a:t>· BISTRO = </a:t>
+              <a:t>· BISTRO(LSTM 백본) = </a:t>
             </a:r>
             <a:r>
               <a:rPr sz="880" b="1">
@@ -4018,8 +4018,8 @@
         </p:nvSpPr>
         <p:spPr>
           <a:xfrm>
-            <a:off x="7452360" y="5532120"/>
-            <a:ext cx="4206240" cy="713232"/>
+            <a:off x="7452360" y="5468112"/>
+            <a:ext cx="4206240" cy="914400"/>
           </a:xfrm>
           <a:prstGeom prst="rect">
             <a:avLst/>
@@ -4062,8 +4062,8 @@
         </p:nvSpPr>
         <p:spPr>
           <a:xfrm>
-            <a:off x="7452360" y="5532120"/>
-            <a:ext cx="41148" cy="713232"/>
+            <a:off x="7452360" y="5468112"/>
+            <a:ext cx="41148" cy="914400"/>
           </a:xfrm>
           <a:prstGeom prst="rect">
             <a:avLst/>
@@ -4106,8 +4106,8 @@
         </p:nvSpPr>
         <p:spPr>
           <a:xfrm>
-            <a:off x="7635240" y="5605272"/>
-            <a:ext cx="3840479" cy="594360"/>
+            <a:off x="7635240" y="5532120"/>
+            <a:ext cx="3840479" cy="822960"/>
           </a:xfrm>
           <a:prstGeom prst="rect">
             <a:avLst/>
@@ -4126,14 +4126,14 @@
               </a:spcAft>
             </a:pPr>
             <a:r>
-              <a:rPr sz="880" b="0">
+              <a:rPr sz="850" b="0">
                 <a:solidFill>
                   <a:srgbClr val="6B6B6B"/>
                 </a:solidFill>
                 <a:latin typeface="Apple SD Gothic Neo"/>
                 <a:ea typeface="Apple SD Gothic Neo"/>
               </a:rPr>
-              <a:t>유의: BISTRO는 당사 GDP 이식 재구현판 기준이며, 원 연구·타 과제</a:t>
+              <a:t>유의 ①: 본 실측 대상은 BISTRO의 LSTM 예측 백본을 당사가 GDP 과제용으로</a:t>
             </a:r>
           </a:p>
           <a:p>
@@ -4143,14 +4143,48 @@
               </a:spcAft>
             </a:pPr>
             <a:r>
-              <a:rPr sz="880" b="0">
+              <a:rPr sz="850" b="0">
                 <a:solidFill>
                   <a:srgbClr val="6B6B6B"/>
                 </a:solidFill>
                 <a:latin typeface="Apple SD Gothic Neo"/>
                 <a:ea typeface="Apple SD Gothic Neo"/>
               </a:rPr>
-              <a:t>성능에 대한 판정이 아닙니다. 원본도 동일 규약 채점 시 비교 가능합니다.</a:t>
+              <a:t>재구현한 이식판 — 원 연구 판정이 아니며, 원본도 동일 규약 채점 시 비교 가능.</a:t>
+            </a:r>
+          </a:p>
+          <a:p>
+            <a:pPr algn="l">
+              <a:spcAft>
+                <a:spcPts val="150"/>
+              </a:spcAft>
+            </a:pPr>
+            <a:r>
+              <a:rPr sz="850" b="0">
+                <a:solidFill>
+                  <a:srgbClr val="6B6B6B"/>
+                </a:solidFill>
+                <a:latin typeface="Apple SD Gothic Neo"/>
+                <a:ea typeface="Apple SD Gothic Neo"/>
+              </a:rPr>
+              <a:t>유의 ②: BISTRO의 HCX 문맥학습(ICL) 구성요소는 학습데이터 오염 문제로</a:t>
+            </a:r>
+          </a:p>
+          <a:p>
+            <a:pPr algn="l">
+              <a:spcAft>
+                <a:spcPts val="150"/>
+              </a:spcAft>
+            </a:pPr>
+            <a:r>
+              <a:rPr sz="850" b="0">
+                <a:solidFill>
+                  <a:srgbClr val="6B6B6B"/>
+                </a:solidFill>
+                <a:latin typeface="Apple SD Gothic Neo"/>
+                <a:ea typeface="Apple SD Gothic Neo"/>
+              </a:rPr>
+              <a:t>실시간 채점이 성립하지 않아 본 비교 실험의 대상이 될 수 없음 (종합리포트 4장).</a:t>
             </a:r>
           </a:p>
         </p:txBody>
